--- a/pptx/charcoal-rich/occ-conference.pptx
+++ b/pptx/charcoal-rich/occ-conference.pptx
@@ -86,7 +86,7 @@
               <c:strCache>
                 <c:ptCount val="1"/>
                 <c:pt idx="0">
-                  <c:v>CD8 점수</c:v>
+                  <c:v>CD8 score</c:v>
                 </c:pt>
               </c:strCache>
             </c:strRef>
@@ -122,7 +122,7 @@
                         </a:solidFill>
                         <a:latin typeface="Pretendard"/>
                       </a:rPr>
-                      <a:t>3.2배</a:t>
+                      <a:t>3.2×</a:t>
                     </a:r>
                   </a:p>
                 </c:rich>
@@ -149,13 +149,13 @@
               <c:strCache>
                 <c:ptCount val="3"/>
                 <c:pt idx="0">
-                  <c:v>정상</c:v>
+                  <c:v>Normal</c:v>
                 </c:pt>
                 <c:pt idx="1">
-                  <c:v>종양 안쪽</c:v>
+                  <c:v>Tumor core</c:v>
                 </c:pt>
                 <c:pt idx="2">
-                  <c:v>경계부</c:v>
+                  <c:v>Border</c:v>
                 </c:pt>
               </c:strCache>
             </c:strRef>
@@ -248,7 +248,7 @@
                     </a:solidFill>
                     <a:latin typeface="Pretendard"/>
                   </a:rPr>
-                  <a:t>상대 점수 (종양 안쪽 = 1)</a:t>
+                  <a:t>Relative score (tumor core = 1)</a:t>
                 </a:r>
               </a:p>
             </c:rich>
@@ -324,7 +324,7 @@
               <c:strCache>
                 <c:ptCount val="1"/>
                 <c:pt idx="0">
-                  <c:v>섬유아세포 신호</c:v>
+                  <c:v>Fibroblast signal</c:v>
                 </c:pt>
               </c:strCache>
             </c:strRef>
@@ -387,10 +387,10 @@
               <c:strCache>
                 <c:ptCount val="2"/>
                 <c:pt idx="0">
-                  <c:v>반응군 (n = 6)</c:v>
+                  <c:v>Responders (n = 6)</c:v>
                 </c:pt>
                 <c:pt idx="1">
-                  <c:v>비반응군 (n = 9)</c:v>
+                  <c:v>Non-responders (n = 9)</c:v>
                 </c:pt>
               </c:strCache>
             </c:strRef>
@@ -480,7 +480,7 @@
                     </a:solidFill>
                     <a:latin typeface="Pretendard"/>
                   </a:rPr>
-                  <a:t>경계부 섬유아세포 신호 (비반응군 = 1)</a:t>
+                  <a:t>Border fibroblast signal (non-responders = 1)</a:t>
                 </a:r>
               </a:p>
             </c:rich>
@@ -3913,7 +3913,7 @@
           <a:lstStyle/>
           <a:p>
             <a:r>
-              <a:t>2026 한국유전체학회 · 구두 발표</a:t>
+              <a:t>Annual meeting 2026 · Oral presentation</a:t>
             </a:r>
           </a:p>
         </p:txBody>
@@ -3934,7 +3934,7 @@
           <a:lstStyle/>
           <a:p>
             <a:r>
-              <a:t>경계부 면역 틈새가 면역항암 반응을 가른다</a:t>
+              <a:t>Border niches gate immunotherapy</a:t>
             </a:r>
           </a:p>
         </p:txBody>
@@ -3955,7 +3955,7 @@
           <a:lstStyle/>
           <a:p>
             <a:r>
-              <a:t>공간전사체 4개 절편 분석</a:t>
+              <a:t>Spatial transcriptomics of 4 colorectal cancer sections</a:t>
             </a:r>
           </a:p>
         </p:txBody>
@@ -3981,7 +3981,7 @@
           </a:p>
           <a:p>
             <a:r>
-              <a:t>HaLab 발표자</a:t>
+              <a:t>HaLab presenter</a:t>
             </a:r>
           </a:p>
         </p:txBody>
@@ -4020,7 +4020,7 @@
           <a:lstStyle/>
           <a:p>
             <a:r>
-              <a:t>왜 중요한가</a:t>
+              <a:t>Why it matters</a:t>
             </a:r>
           </a:p>
         </p:txBody>
@@ -4041,7 +4041,7 @@
           <a:lstStyle/>
           <a:p>
             <a:r>
-              <a:t>면역항암제는 대장암 환자 10명 중 1명에게만 들어요</a:t>
+              <a:t>Immunotherapy helps only 1 in 10 colorectal cancer patients</a:t>
             </a:r>
           </a:p>
         </p:txBody>
@@ -4200,7 +4200,7 @@
                   <a:srgbClr val="262B33"/>
                 </a:solidFill>
               </a:rPr>
-              <a:t>면역항암제 반응률</a:t>
+              <a:t>Respond to immunotherapy</a:t>
             </a:r>
           </a:p>
         </p:txBody>
@@ -4238,7 +4238,7 @@
                   <a:srgbClr val="6B7280"/>
                 </a:solidFill>
               </a:rPr>
-              <a:t>전이성 대장암 (예시 수치)</a:t>
+              <a:t>Metastatic colorectal cancer (example)</a:t>
             </a:r>
           </a:p>
         </p:txBody>
@@ -4390,7 +4390,7 @@
                   <a:srgbClr val="262B33"/>
                 </a:solidFill>
               </a:rPr>
-              <a:t>반응하지 않는 환자</a:t>
+              <a:t>Do not respond</a:t>
             </a:r>
           </a:p>
         </p:txBody>
@@ -4428,7 +4428,7 @@
                   <a:srgbClr val="6B7280"/>
                 </a:solidFill>
               </a:rPr>
-              <a:t>MSI 검사로는 절반만 가려냄</a:t>
+              <a:t>MSI testing explains only half</a:t>
             </a:r>
           </a:p>
         </p:txBody>
@@ -4496,28 +4496,20 @@
               </a:lnSpc>
             </a:pPr>
             <a:r>
+              <a:rPr sz="1400" b="1" spc="-40">
+                <a:solidFill>
+                  <a:srgbClr val="262B33"/>
+                </a:solidFill>
+              </a:rPr>
+              <a:t>Why</a:t>
+            </a:r>
+            <a:r>
               <a:rPr sz="1400" b="0" spc="-40">
                 <a:solidFill>
                   <a:srgbClr val="6B7280"/>
                 </a:solidFill>
               </a:rPr>
-              <a:t>나머지 90%는 </a:t>
-            </a:r>
-            <a:r>
-              <a:rPr sz="1400" b="1" spc="-40">
-                <a:solidFill>
-                  <a:srgbClr val="262B33"/>
-                </a:solidFill>
-              </a:rPr>
-              <a:t>왜</a:t>
-            </a:r>
-            <a:r>
-              <a:rPr sz="1400" b="0" spc="-40">
-                <a:solidFill>
-                  <a:srgbClr val="6B7280"/>
-                </a:solidFill>
-              </a:rPr>
-              <a:t> 반응하지 않을까?</a:t>
+              <a:t> do the other 90% not respond?</a:t>
             </a:r>
           </a:p>
         </p:txBody>
@@ -4578,7 +4570,7 @@
           <a:lstStyle/>
           <a:p>
             <a:r>
-              <a:t>가설</a:t>
+              <a:t>Hypothesis</a:t>
             </a:r>
           </a:p>
         </p:txBody>
@@ -4599,7 +4591,7 @@
           <a:lstStyle/>
           <a:p>
             <a:r>
-              <a:t>섬유아세포 장벽이 T세포가 종양 안으로 들어가는 걸 막아요</a:t>
+              <a:t>A fibroblast barrier keeps T cells out of the tumor</a:t>
             </a:r>
           </a:p>
         </p:txBody>
@@ -4612,8 +4604,8 @@
         </p:nvCxnSpPr>
         <p:spPr>
           <a:xfrm>
-            <a:off x="2464461" y="2922938"/>
-            <a:ext cx="1070892" cy="0"/>
+            <a:off x="2688121" y="2923408"/>
+            <a:ext cx="772679" cy="0"/>
           </a:xfrm>
           <a:prstGeom prst="line">
             <a:avLst/>
@@ -4648,8 +4640,8 @@
         </p:nvCxnSpPr>
         <p:spPr>
           <a:xfrm>
-            <a:off x="5560614" y="2922938"/>
-            <a:ext cx="1070892" cy="0"/>
+            <a:off x="5709721" y="2923408"/>
+            <a:ext cx="772678" cy="0"/>
           </a:xfrm>
           <a:prstGeom prst="line">
             <a:avLst/>
@@ -4685,8 +4677,8 @@
         </p:nvCxnSpPr>
         <p:spPr>
           <a:xfrm>
-            <a:off x="8656767" y="2922938"/>
-            <a:ext cx="1070892" cy="0"/>
+            <a:off x="8731320" y="2923408"/>
+            <a:ext cx="772679" cy="0"/>
           </a:xfrm>
           <a:prstGeom prst="line">
             <a:avLst/>
@@ -4722,8 +4714,8 @@
         </p:nvSpPr>
         <p:spPr>
           <a:xfrm>
-            <a:off x="468000" y="2545552"/>
-            <a:ext cx="1967661" cy="754773"/>
+            <a:off x="468000" y="2546022"/>
+            <a:ext cx="2191321" cy="754773"/>
           </a:xfrm>
           <a:prstGeom prst="rect">
             <a:avLst/>
@@ -4766,8 +4758,8 @@
         </p:nvSpPr>
         <p:spPr>
           <a:xfrm>
-            <a:off x="655200" y="2545552"/>
-            <a:ext cx="1593261" cy="754773"/>
+            <a:off x="655200" y="2546022"/>
+            <a:ext cx="1816921" cy="754773"/>
           </a:xfrm>
           <a:prstGeom prst="rect">
             <a:avLst/>
@@ -4791,7 +4783,7 @@
                   <a:srgbClr val="262B33"/>
                 </a:solidFill>
               </a:rPr>
-              <a:t>TGF-β 신호</a:t>
+              <a:t>TGF-β signaling</a:t>
             </a:r>
           </a:p>
         </p:txBody>
@@ -4804,8 +4796,8 @@
         </p:nvSpPr>
         <p:spPr>
           <a:xfrm>
-            <a:off x="3564153" y="2312963"/>
-            <a:ext cx="1967661" cy="1219950"/>
+            <a:off x="3489600" y="2312022"/>
+            <a:ext cx="2191321" cy="1222773"/>
           </a:xfrm>
           <a:prstGeom prst="ellipse">
             <a:avLst/>
@@ -4846,8 +4838,8 @@
         </p:nvSpPr>
         <p:spPr>
           <a:xfrm>
-            <a:off x="3859302" y="2312963"/>
-            <a:ext cx="1377363" cy="1219950"/>
+            <a:off x="3818298" y="2312022"/>
+            <a:ext cx="1533925" cy="1222773"/>
           </a:xfrm>
           <a:prstGeom prst="rect">
             <a:avLst/>
@@ -4871,7 +4863,7 @@
                   <a:srgbClr val="FFFFFF"/>
                 </a:solidFill>
               </a:rPr>
-              <a:t>경계부 섬유아세포</a:t>
+              <a:t>Border fibroblasts</a:t>
             </a:r>
           </a:p>
           <a:p>
@@ -4889,7 +4881,7 @@
                   <a:srgbClr val="FFFFFF"/>
                 </a:solidFill>
               </a:rPr>
-              <a:t>이번 연구</a:t>
+              <a:t>This study</a:t>
             </a:r>
           </a:p>
         </p:txBody>
@@ -4902,8 +4894,8 @@
         </p:nvSpPr>
         <p:spPr>
           <a:xfrm>
-            <a:off x="6660306" y="2545552"/>
-            <a:ext cx="1967661" cy="754773"/>
+            <a:off x="6511199" y="2546022"/>
+            <a:ext cx="2191321" cy="754773"/>
           </a:xfrm>
           <a:prstGeom prst="roundRect">
             <a:avLst>
@@ -4946,8 +4938,8 @@
         </p:nvSpPr>
         <p:spPr>
           <a:xfrm>
-            <a:off x="6847506" y="2545552"/>
-            <a:ext cx="1593261" cy="754773"/>
+            <a:off x="6698399" y="2546022"/>
+            <a:ext cx="1816921" cy="754773"/>
           </a:xfrm>
           <a:prstGeom prst="rect">
             <a:avLst/>
@@ -4971,7 +4963,7 @@
                   <a:srgbClr val="262B33"/>
                 </a:solidFill>
               </a:rPr>
-              <a:t>콜라겐 장벽</a:t>
+              <a:t>Collagen barrier</a:t>
             </a:r>
           </a:p>
         </p:txBody>
@@ -4984,8 +4976,8 @@
         </p:nvSpPr>
         <p:spPr>
           <a:xfrm>
-            <a:off x="9756459" y="2545552"/>
-            <a:ext cx="1967661" cy="754773"/>
+            <a:off x="9532799" y="2546022"/>
+            <a:ext cx="2191321" cy="754773"/>
           </a:xfrm>
           <a:prstGeom prst="rect">
             <a:avLst/>
@@ -5028,8 +5020,8 @@
         </p:nvSpPr>
         <p:spPr>
           <a:xfrm>
-            <a:off x="9943659" y="2545552"/>
-            <a:ext cx="1593261" cy="754773"/>
+            <a:off x="9719999" y="2546022"/>
+            <a:ext cx="1816921" cy="754773"/>
           </a:xfrm>
           <a:prstGeom prst="rect">
             <a:avLst/>
@@ -5053,7 +5045,7 @@
                   <a:srgbClr val="262B33"/>
                 </a:solidFill>
               </a:rPr>
-              <a:t>T세포 침투 실패</a:t>
+              <a:t>T-cell exclusion</a:t>
             </a:r>
           </a:p>
         </p:txBody>
@@ -5066,7 +5058,7 @@
         </p:nvCxnSpPr>
         <p:spPr>
           <a:xfrm>
-            <a:off x="9063673" y="3834496"/>
+            <a:off x="8944139" y="3836377"/>
             <a:ext cx="421200" cy="0"/>
           </a:xfrm>
           <a:prstGeom prst="line">
@@ -5102,8 +5094,8 @@
         </p:nvSpPr>
         <p:spPr>
           <a:xfrm>
-            <a:off x="9578473" y="3743513"/>
-            <a:ext cx="738340" cy="181966"/>
+            <a:off x="9458939" y="3745395"/>
+            <a:ext cx="513177" cy="181966"/>
           </a:xfrm>
           <a:prstGeom prst="rect">
             <a:avLst/>
@@ -5127,7 +5119,7 @@
                   <a:srgbClr val="6B7280"/>
                 </a:solidFill>
               </a:rPr>
-              <a:t>알려진 경로</a:t>
+              <a:t>Known</a:t>
             </a:r>
           </a:p>
         </p:txBody>
@@ -5140,7 +5132,7 @@
         </p:nvCxnSpPr>
         <p:spPr>
           <a:xfrm>
-            <a:off x="10597614" y="3834496"/>
+            <a:off x="10252917" y="3836377"/>
             <a:ext cx="421200" cy="0"/>
           </a:xfrm>
           <a:prstGeom prst="line">
@@ -5177,8 +5169,8 @@
         </p:nvSpPr>
         <p:spPr>
           <a:xfrm>
-            <a:off x="11112414" y="3743513"/>
-            <a:ext cx="611706" cy="181966"/>
+            <a:off x="10767717" y="3745395"/>
+            <a:ext cx="956403" cy="181966"/>
           </a:xfrm>
           <a:prstGeom prst="rect">
             <a:avLst/>
@@ -5202,7 +5194,7 @@
                   <a:srgbClr val="6B7280"/>
                 </a:solidFill>
               </a:rPr>
-              <a:t>가설 경로</a:t>
+              <a:t>Hypothesized</a:t>
             </a:r>
           </a:p>
         </p:txBody>
@@ -5215,7 +5207,7 @@
         </p:nvCxnSpPr>
         <p:spPr>
           <a:xfrm>
-            <a:off x="468000" y="4141479"/>
+            <a:off x="468000" y="4143360"/>
             <a:ext cx="11256120" cy="0"/>
           </a:xfrm>
           <a:prstGeom prst="line">
@@ -5250,7 +5242,7 @@
         </p:nvSpPr>
         <p:spPr>
           <a:xfrm>
-            <a:off x="468000" y="4339479"/>
+            <a:off x="468000" y="4341360"/>
             <a:ext cx="11256120" cy="304596"/>
           </a:xfrm>
           <a:prstGeom prst="rect">
@@ -5275,7 +5267,7 @@
                   <a:srgbClr val="6B7280"/>
                 </a:solidFill>
               </a:rPr>
-              <a:t>확인할 것: 장벽을 없애면 CD8 T세포가 종양 안으로 들어가는가</a:t>
+              <a:t>To test: do CD8 T cells enter the tumor when the barrier is removed?</a:t>
             </a:r>
           </a:p>
         </p:txBody>
@@ -5336,7 +5328,7 @@
           <a:lstStyle/>
           <a:p>
             <a:r>
-              <a:t>결과 1</a:t>
+              <a:t>Result 1</a:t>
             </a:r>
           </a:p>
         </p:txBody>
@@ -5357,7 +5349,7 @@
           <a:lstStyle/>
           <a:p>
             <a:r>
-              <a:t>경계부에 면역세포가 띠처럼 모여 있어요</a:t>
+              <a:t>Immune cells gather in a band at the tumor border</a:t>
             </a:r>
           </a:p>
         </p:txBody>
@@ -5528,7 +5520,7 @@
                   <a:srgbClr val="6B7280"/>
                 </a:solidFill>
               </a:rPr>
-              <a:t>절편 2, 스팟 1,492개, 클러스터 6개 (예시 데이터)</a:t>
+              <a:t>Section 2, 1,492 spots, 6 clusters (example data)</a:t>
             </a:r>
           </a:p>
         </p:txBody>
@@ -5542,7 +5534,7 @@
         <p:spPr>
           <a:xfrm>
             <a:off x="8044080" y="1584000"/>
-            <a:ext cx="3680040" cy="1341126"/>
+            <a:ext cx="3680040" cy="1617107"/>
           </a:xfrm>
           <a:prstGeom prst="rect">
             <a:avLst/>
@@ -5583,7 +5575,7 @@
         </p:nvCxnSpPr>
         <p:spPr>
           <a:xfrm>
-            <a:off x="8044080" y="2925126"/>
+            <a:off x="8044080" y="3201107"/>
             <a:ext cx="3680040" cy="0"/>
           </a:xfrm>
           <a:prstGeom prst="line">
@@ -5695,7 +5687,7 @@
                   <a:srgbClr val="262B33"/>
                 </a:solidFill>
               </a:rPr>
-              <a:t>경계부</a:t>
+              <a:t>Border</a:t>
             </a:r>
           </a:p>
         </p:txBody>
@@ -5709,7 +5701,7 @@
         <p:spPr>
           <a:xfrm>
             <a:off x="8512080" y="2289145"/>
-            <a:ext cx="3212040" cy="293981"/>
+            <a:ext cx="3212040" cy="569962"/>
           </a:xfrm>
           <a:prstGeom prst="rect">
             <a:avLst/>
@@ -5733,7 +5725,7 @@
                   <a:srgbClr val="6B7280"/>
                 </a:solidFill>
               </a:rPr>
-              <a:t>클러스터 3, 면역세포 표지가 높은 얇은 띠</a:t>
+              <a:t>Cluster 3, a thin band high in immune markers</a:t>
             </a:r>
           </a:p>
         </p:txBody>
@@ -5746,7 +5738,7 @@
         </p:nvSpPr>
         <p:spPr>
           <a:xfrm>
-            <a:off x="8044080" y="3286699"/>
+            <a:off x="8044080" y="3700670"/>
             <a:ext cx="288000" cy="288000"/>
           </a:xfrm>
           <a:prstGeom prst="ellipse">
@@ -5798,7 +5790,7 @@
         </p:nvSpPr>
         <p:spPr>
           <a:xfrm>
-            <a:off x="8512080" y="3285126"/>
+            <a:off x="8512080" y="3699098"/>
             <a:ext cx="3212040" cy="291145"/>
           </a:xfrm>
           <a:prstGeom prst="rect">
@@ -5823,7 +5815,7 @@
                   <a:srgbClr val="262B33"/>
                 </a:solidFill>
               </a:rPr>
-              <a:t>종양 안쪽</a:t>
+              <a:t>Tumor core</a:t>
             </a:r>
           </a:p>
         </p:txBody>
@@ -5836,7 +5828,7 @@
         </p:nvSpPr>
         <p:spPr>
           <a:xfrm>
-            <a:off x="8512080" y="3630271"/>
+            <a:off x="8512080" y="4044243"/>
             <a:ext cx="3212040" cy="293981"/>
           </a:xfrm>
           <a:prstGeom prst="rect">
@@ -5861,7 +5853,7 @@
                   <a:srgbClr val="6B7280"/>
                 </a:solidFill>
               </a:rPr>
-              <a:t>클러스터 1 · 2, 면역 표지 낮음</a:t>
+              <a:t>Clusters 1 · 2, low immune markers</a:t>
             </a:r>
           </a:p>
         </p:txBody>
@@ -5922,7 +5914,7 @@
           <a:lstStyle/>
           <a:p>
             <a:r>
-              <a:t>결과 2</a:t>
+              <a:t>Result 2</a:t>
             </a:r>
           </a:p>
         </p:txBody>
@@ -5943,7 +5935,7 @@
           <a:lstStyle/>
           <a:p>
             <a:r>
-              <a:t>경계부 CD8 점수가 종양 안쪽보다 3.2배 높아요</a:t>
+              <a:t>The CD8 score is 3.2× higher at the border than in the core</a:t>
             </a:r>
           </a:p>
         </p:txBody>
@@ -5999,7 +5991,7 @@
                   <a:srgbClr val="6B7280"/>
                 </a:solidFill>
               </a:rPr>
-              <a:t>표지 유전자 12개 평균. 절편 4개.</a:t>
+              <a:t>Mean of 12 marker genes. 4 sections.</a:t>
             </a:r>
           </a:p>
         </p:txBody>
@@ -6060,7 +6052,7 @@
           <a:lstStyle/>
           <a:p>
             <a:r>
-              <a:t>결과 3</a:t>
+              <a:t>Result 3</a:t>
             </a:r>
           </a:p>
         </p:txBody>
@@ -6081,7 +6073,7 @@
           <a:lstStyle/>
           <a:p>
             <a:r>
-              <a:t>반응군은 경계부 섬유아세포 신호가 절반 이하예요</a:t>
+              <a:t>Responders have less than half the border fibroblast signal</a:t>
             </a:r>
           </a:p>
         </p:txBody>
@@ -6137,7 +6129,7 @@
                   <a:srgbClr val="6B7280"/>
                 </a:solidFill>
               </a:rPr>
-              <a:t>치료 전 생검 절편, 예시 수치.</a:t>
+              <a:t>Pre-treatment biopsy sections, example values.</a:t>
             </a:r>
           </a:p>
         </p:txBody>
@@ -6198,7 +6190,7 @@
           <a:lstStyle/>
           <a:p>
             <a:r>
-              <a:t>결론</a:t>
+              <a:t>Conclusion</a:t>
             </a:r>
           </a:p>
         </p:txBody>
@@ -6219,7 +6211,7 @@
           <a:lstStyle/>
           <a:p>
             <a:r>
-              <a:t>경계부 섬유아세포 장벽이 면역항암 반응을 가를 수 있어요</a:t>
+              <a:t>A border fibroblast barrier may decide immunotherapy response</a:t>
             </a:r>
           </a:p>
         </p:txBody>
@@ -6232,7 +6224,7 @@
         </p:nvSpPr>
         <p:spPr>
           <a:xfrm>
-            <a:off x="468000" y="2138600"/>
+            <a:off x="468000" y="2024872"/>
             <a:ext cx="3608040" cy="1436613"/>
           </a:xfrm>
           <a:prstGeom prst="rect">
@@ -6276,7 +6268,7 @@
         </p:nvSpPr>
         <p:spPr>
           <a:xfrm>
-            <a:off x="608400" y="2325800"/>
+            <a:off x="608400" y="2212072"/>
             <a:ext cx="351000" cy="351000"/>
           </a:xfrm>
           <a:prstGeom prst="ellipse">
@@ -6330,7 +6322,7 @@
         </p:nvSpPr>
         <p:spPr>
           <a:xfrm>
-            <a:off x="608400" y="2793800"/>
+            <a:off x="608400" y="2680072"/>
             <a:ext cx="3327240" cy="594213"/>
           </a:xfrm>
           <a:prstGeom prst="rect">
@@ -6355,7 +6347,7 @@
                   <a:srgbClr val="262B33"/>
                 </a:solidFill>
               </a:rPr>
-              <a:t>경계부에 몰림</a:t>
+              <a:t>Gathered at the border</a:t>
             </a:r>
           </a:p>
           <a:p>
@@ -6370,7 +6362,7 @@
                   <a:srgbClr val="6B7280"/>
                 </a:solidFill>
               </a:rPr>
-              <a:t>CD8 점수 3.2배 (경계부 / 안쪽)</a:t>
+              <a:t>CD8 score 3.2× (border / core)</a:t>
             </a:r>
           </a:p>
         </p:txBody>
@@ -6383,7 +6375,7 @@
         </p:nvSpPr>
         <p:spPr>
           <a:xfrm>
-            <a:off x="4292040" y="2138600"/>
+            <a:off x="4292040" y="2024872"/>
             <a:ext cx="3608040" cy="1436613"/>
           </a:xfrm>
           <a:prstGeom prst="rect">
@@ -6427,7 +6419,7 @@
         </p:nvSpPr>
         <p:spPr>
           <a:xfrm>
-            <a:off x="4432440" y="2325800"/>
+            <a:off x="4432440" y="2212072"/>
             <a:ext cx="351000" cy="351000"/>
           </a:xfrm>
           <a:prstGeom prst="ellipse">
@@ -6481,7 +6473,7 @@
         </p:nvSpPr>
         <p:spPr>
           <a:xfrm>
-            <a:off x="4432440" y="2793800"/>
+            <a:off x="4432440" y="2680072"/>
             <a:ext cx="3327240" cy="594213"/>
           </a:xfrm>
           <a:prstGeom prst="rect">
@@ -6506,7 +6498,7 @@
                   <a:srgbClr val="262B33"/>
                 </a:solidFill>
               </a:rPr>
-              <a:t>섬유아세포 신호</a:t>
+              <a:t>Fibroblast signal</a:t>
             </a:r>
           </a:p>
           <a:p>
@@ -6521,7 +6513,7 @@
                   <a:srgbClr val="6B7280"/>
                 </a:solidFill>
               </a:rPr>
-              <a:t>비반응군에서 2.5배 높음</a:t>
+              <a:t>2.5× higher in non-responders</a:t>
             </a:r>
           </a:p>
         </p:txBody>
@@ -6534,7 +6526,7 @@
         </p:nvSpPr>
         <p:spPr>
           <a:xfrm>
-            <a:off x="8116080" y="2138600"/>
+            <a:off x="8116080" y="2024872"/>
             <a:ext cx="3608040" cy="1436613"/>
           </a:xfrm>
           <a:prstGeom prst="rect">
@@ -6578,7 +6570,7 @@
         </p:nvSpPr>
         <p:spPr>
           <a:xfrm>
-            <a:off x="8256480" y="2325800"/>
+            <a:off x="8256480" y="2212072"/>
             <a:ext cx="351000" cy="351000"/>
           </a:xfrm>
           <a:prstGeom prst="ellipse">
@@ -6632,7 +6624,7 @@
         </p:nvSpPr>
         <p:spPr>
           <a:xfrm>
-            <a:off x="8256480" y="2793800"/>
+            <a:off x="8256480" y="2680072"/>
             <a:ext cx="3327240" cy="594213"/>
           </a:xfrm>
           <a:prstGeom prst="rect">
@@ -6657,7 +6649,7 @@
                   <a:srgbClr val="262B33"/>
                 </a:solidFill>
               </a:rPr>
-              <a:t>반응군은 장벽이 얇음</a:t>
+              <a:t>Thin barrier in responders</a:t>
             </a:r>
           </a:p>
           <a:p>
@@ -6672,7 +6664,7 @@
                   <a:srgbClr val="6B7280"/>
                 </a:solidFill>
               </a:rPr>
-              <a:t>반응군 6명 모두 신호 절반 이하</a:t>
+              <a:t>All 6 responders below half</a:t>
             </a:r>
           </a:p>
         </p:txBody>
@@ -6685,7 +6677,7 @@
         </p:nvCxnSpPr>
         <p:spPr>
           <a:xfrm>
-            <a:off x="2272020" y="3575213"/>
+            <a:off x="2272020" y="3461485"/>
             <a:ext cx="0" cy="327600"/>
           </a:xfrm>
           <a:prstGeom prst="line">
@@ -6720,7 +6712,7 @@
         </p:nvCxnSpPr>
         <p:spPr>
           <a:xfrm>
-            <a:off x="6096060" y="3575213"/>
+            <a:off x="6096060" y="3461485"/>
             <a:ext cx="0" cy="327600"/>
           </a:xfrm>
           <a:prstGeom prst="line">
@@ -6755,7 +6747,7 @@
         </p:nvCxnSpPr>
         <p:spPr>
           <a:xfrm>
-            <a:off x="9920100" y="3575213"/>
+            <a:off x="9920100" y="3461485"/>
             <a:ext cx="0" cy="327600"/>
           </a:xfrm>
           <a:prstGeom prst="line">
@@ -6790,7 +6782,7 @@
         </p:nvCxnSpPr>
         <p:spPr>
           <a:xfrm>
-            <a:off x="2272020" y="3902813"/>
+            <a:off x="2272020" y="3789085"/>
             <a:ext cx="7648080" cy="0"/>
           </a:xfrm>
           <a:prstGeom prst="line">
@@ -6825,7 +6817,7 @@
         </p:nvCxnSpPr>
         <p:spPr>
           <a:xfrm>
-            <a:off x="6096060" y="3902813"/>
+            <a:off x="6096060" y="3789085"/>
             <a:ext cx="0" cy="327600"/>
           </a:xfrm>
           <a:prstGeom prst="line">
@@ -6861,8 +6853,8 @@
         </p:nvSpPr>
         <p:spPr>
           <a:xfrm>
-            <a:off x="2380020" y="4230413"/>
-            <a:ext cx="7432080" cy="762386"/>
+            <a:off x="2380020" y="4116685"/>
+            <a:ext cx="7432080" cy="1103571"/>
           </a:xfrm>
           <a:prstGeom prst="rect">
             <a:avLst/>
@@ -6903,8 +6895,8 @@
         </p:nvSpPr>
         <p:spPr>
           <a:xfrm>
-            <a:off x="2660820" y="4230413"/>
-            <a:ext cx="6870480" cy="762386"/>
+            <a:off x="2660820" y="4116685"/>
+            <a:ext cx="6870480" cy="1103571"/>
           </a:xfrm>
           <a:prstGeom prst="rect">
             <a:avLst/>
@@ -6928,7 +6920,7 @@
                   <a:srgbClr val="FFFFFF"/>
                 </a:solidFill>
               </a:rPr>
-              <a:t>섬유아세포 장벽을 낮추면 면역항암 반응이 늘 수 있다</a:t>
+              <a:t>Lowering the fibroblast barrier may improve immunotherapy response</a:t>
             </a:r>
           </a:p>
         </p:txBody>
@@ -6989,7 +6981,7 @@
           <a:lstStyle/>
           <a:p>
             <a:r>
-              <a:t>감사합니다</a:t>
+              <a:t>Thank you</a:t>
             </a:r>
           </a:p>
         </p:txBody>
@@ -7010,7 +7002,7 @@
           <a:lstStyle/>
           <a:p>
             <a:r>
-              <a:t>대장암 경계부의 면역 틈새가 면역항암 반응을 가른다</a:t>
+              <a:t>A border immune niche decides immunotherapy response in colorectal cancer</a:t>
             </a:r>
           </a:p>
         </p:txBody>
@@ -7031,12 +7023,12 @@
           <a:lstStyle/>
           <a:p>
             <a:r>
-              <a:t>공동저자 · HaLab</a:t>
-            </a:r>
-          </a:p>
-          <a:p>
-            <a:r>
-              <a:t>연구비: 예시 과제 (과제 번호)</a:t>
+              <a:t>Co-authors · HaLab</a:t>
+            </a:r>
+          </a:p>
+          <a:p>
+            <a:r>
+              <a:t>Funding: example grant (grant no.)</a:t>
             </a:r>
           </a:p>
         </p:txBody>
